--- a/Requirements/BaoCao_Chude04_CleanArchitecture_DI.pptx
+++ b/Requirements/BaoCao_Chude04_CleanArchitecture_DI.pptx
@@ -3411,15 +3411,28 @@
           <a:lstStyle/>
           <a:p>
             <a:pPr>
-              <a:defRPr sz="1600"/>
+              <a:defRPr sz="1500"/>
             </a:pPr>
             <a:r>
+              <a:t>Người hướng dẫn: TS. Nguyễn Duy Nhật Viễn</a:t>
+            </a:r>
+          </a:p>
+          <a:p>
+            <a:pPr>
+              <a:defRPr sz="1500"/>
+            </a:pPr>
+          </a:p>
+          <a:p>
+            <a:pPr>
+              <a:defRPr sz="1500"/>
+            </a:pPr>
+            <a:r>
               <a:t>SVTH:</a:t>
             </a:r>
           </a:p>
           <a:p>
             <a:pPr>
-              <a:defRPr sz="1600"/>
+              <a:defRPr sz="1500"/>
             </a:pPr>
             <a:r>
               <a:t>1. Thành viên 1 (Trưởng nhóm)</a:t>
@@ -3427,7 +3440,7 @@
           </a:p>
           <a:p>
             <a:pPr>
-              <a:defRPr sz="1600"/>
+              <a:defRPr sz="1500"/>
             </a:pPr>
             <a:r>
               <a:t>2. Thành viên 2</a:t>
